--- a/static/courses/cis-7000-fall2025/downloads/ESPH-explain-dp.pptx
+++ b/static/courses/cis-7000-fall2025/downloads/ESPH-explain-dp.pptx
@@ -659,6 +659,198 @@
           <a:p>
             <a:r>
               <a:rPr lang="en-US" dirty="0"/>
+              <a:t>Over 2x as likely to answer an additional objective risk comprehension question correctly with Odds-Based Visual vs. Deterministic Control </a:t>
+            </a:r>
+          </a:p>
+          <a:p>
+            <a:r>
+              <a:rPr lang="en-US" dirty="0"/>
+              <a:t>Negative effect of our Sample Reports (O.R. = 0.32) </a:t>
+            </a:r>
+          </a:p>
+          <a:p>
+            <a:r>
+              <a:rPr lang="en-US" dirty="0"/>
+              <a:t>No significant effect of Odds-Based Text</a:t>
+            </a:r>
+          </a:p>
+        </p:txBody>
+      </p:sp>
+      <p:sp>
+        <p:nvSpPr>
+          <p:cNvPr id="4" name="Slide Number Placeholder 3"/>
+          <p:cNvSpPr>
+            <a:spLocks noGrp="1"/>
+          </p:cNvSpPr>
+          <p:nvPr>
+            <p:ph type="sldNum" sz="quarter" idx="5"/>
+          </p:nvPr>
+        </p:nvSpPr>
+        <p:spPr/>
+        <p:txBody>
+          <a:bodyPr/>
+          <a:lstStyle/>
+          <a:p>
+            <a:fld id="{C123C96B-2B3F-7242-90A1-56E5F222F20D}" type="slidenum">
+              <a:rPr lang="en-US" smtClean="0"/>
+              <a:t>16</a:t>
+            </a:fld>
+            <a:endParaRPr lang="en-US"/>
+          </a:p>
+        </p:txBody>
+      </p:sp>
+    </p:spTree>
+    <p:extLst>
+      <p:ext uri="{BB962C8B-B14F-4D97-AF65-F5344CB8AC3E}">
+        <p14:creationId xmlns:p14="http://schemas.microsoft.com/office/powerpoint/2010/main" val="3760300140"/>
+      </p:ext>
+    </p:extLst>
+  </p:cSld>
+  <p:clrMapOvr>
+    <a:masterClrMapping/>
+  </p:clrMapOvr>
+</p:notes>
+</file>
+
+<file path=ppt/notesSlides/notesSlide11.xml><?xml version="1.0" encoding="utf-8"?>
+<p:notes xmlns:a="http://schemas.openxmlformats.org/drawingml/2006/main" xmlns:r="http://schemas.openxmlformats.org/officeDocument/2006/relationships" xmlns:p="http://schemas.openxmlformats.org/presentationml/2006/main">
+  <p:cSld>
+    <p:spTree>
+      <p:nvGrpSpPr>
+        <p:cNvPr id="1" name=""/>
+        <p:cNvGrpSpPr/>
+        <p:nvPr/>
+      </p:nvGrpSpPr>
+      <p:grpSpPr>
+        <a:xfrm>
+          <a:off x="0" y="0"/>
+          <a:ext cx="0" cy="0"/>
+          <a:chOff x="0" y="0"/>
+          <a:chExt cx="0" cy="0"/>
+        </a:xfrm>
+      </p:grpSpPr>
+      <p:sp>
+        <p:nvSpPr>
+          <p:cNvPr id="2" name="Slide Image Placeholder 1"/>
+          <p:cNvSpPr>
+            <a:spLocks noGrp="1" noRot="1" noChangeAspect="1"/>
+          </p:cNvSpPr>
+          <p:nvPr>
+            <p:ph type="sldImg"/>
+          </p:nvPr>
+        </p:nvSpPr>
+        <p:spPr/>
+      </p:sp>
+      <p:sp>
+        <p:nvSpPr>
+          <p:cNvPr id="3" name="Notes Placeholder 2"/>
+          <p:cNvSpPr>
+            <a:spLocks noGrp="1"/>
+          </p:cNvSpPr>
+          <p:nvPr>
+            <p:ph type="body" idx="1"/>
+          </p:nvPr>
+        </p:nvSpPr>
+        <p:spPr/>
+        <p:txBody>
+          <a:bodyPr/>
+          <a:lstStyle/>
+          <a:p>
+            <a:pPr marL="0" indent="0">
+              <a:buNone/>
+            </a:pPr>
+            <a:r>
+              <a:rPr lang="en-US" dirty="0"/>
+              <a:t>Compared to Sample Reports, Odds-Based Text and Odds-Based Visual improved subjective privacy understanding (O.R. = 1.7; 1.5) </a:t>
+            </a:r>
+          </a:p>
+          <a:p>
+            <a:endParaRPr lang="en-US" dirty="0"/>
+          </a:p>
+        </p:txBody>
+      </p:sp>
+      <p:sp>
+        <p:nvSpPr>
+          <p:cNvPr id="4" name="Slide Number Placeholder 3"/>
+          <p:cNvSpPr>
+            <a:spLocks noGrp="1"/>
+          </p:cNvSpPr>
+          <p:nvPr>
+            <p:ph type="sldNum" sz="quarter" idx="5"/>
+          </p:nvPr>
+        </p:nvSpPr>
+        <p:spPr/>
+        <p:txBody>
+          <a:bodyPr/>
+          <a:lstStyle/>
+          <a:p>
+            <a:fld id="{C123C96B-2B3F-7242-90A1-56E5F222F20D}" type="slidenum">
+              <a:rPr lang="en-US" smtClean="0"/>
+              <a:t>17</a:t>
+            </a:fld>
+            <a:endParaRPr lang="en-US"/>
+          </a:p>
+        </p:txBody>
+      </p:sp>
+    </p:spTree>
+    <p:extLst>
+      <p:ext uri="{BB962C8B-B14F-4D97-AF65-F5344CB8AC3E}">
+        <p14:creationId xmlns:p14="http://schemas.microsoft.com/office/powerpoint/2010/main" val="1683729281"/>
+      </p:ext>
+    </p:extLst>
+  </p:cSld>
+  <p:clrMapOvr>
+    <a:masterClrMapping/>
+  </p:clrMapOvr>
+</p:notes>
+</file>
+
+<file path=ppt/notesSlides/notesSlide12.xml><?xml version="1.0" encoding="utf-8"?>
+<p:notes xmlns:a="http://schemas.openxmlformats.org/drawingml/2006/main" xmlns:r="http://schemas.openxmlformats.org/officeDocument/2006/relationships" xmlns:p="http://schemas.openxmlformats.org/presentationml/2006/main">
+  <p:cSld>
+    <p:spTree>
+      <p:nvGrpSpPr>
+        <p:cNvPr id="1" name=""/>
+        <p:cNvGrpSpPr/>
+        <p:nvPr/>
+      </p:nvGrpSpPr>
+      <p:grpSpPr>
+        <a:xfrm>
+          <a:off x="0" y="0"/>
+          <a:ext cx="0" cy="0"/>
+          <a:chOff x="0" y="0"/>
+          <a:chExt cx="0" cy="0"/>
+        </a:xfrm>
+      </p:grpSpPr>
+      <p:sp>
+        <p:nvSpPr>
+          <p:cNvPr id="2" name="Slide Image Placeholder 1"/>
+          <p:cNvSpPr>
+            <a:spLocks noGrp="1" noRot="1" noChangeAspect="1"/>
+          </p:cNvSpPr>
+          <p:nvPr>
+            <p:ph type="sldImg"/>
+          </p:nvPr>
+        </p:nvSpPr>
+        <p:spPr/>
+      </p:sp>
+      <p:sp>
+        <p:nvSpPr>
+          <p:cNvPr id="3" name="Notes Placeholder 2"/>
+          <p:cNvSpPr>
+            <a:spLocks noGrp="1"/>
+          </p:cNvSpPr>
+          <p:nvPr>
+            <p:ph type="body" idx="1"/>
+          </p:nvPr>
+        </p:nvSpPr>
+        <p:spPr/>
+        <p:txBody>
+          <a:bodyPr/>
+          <a:lstStyle/>
+          <a:p>
+            <a:r>
+              <a:rPr lang="en-US" dirty="0"/>
               <a:t>Compared to the Xiong et al. Control, Odds-Based Text and Odds-Based Visual improved self-efficacy (enough info) (O.R. = 1.8; 1.7)</a:t>
             </a:r>
           </a:p>
@@ -1106,6 +1298,15 @@
           <a:p>
             <a:r>
               <a:rPr lang="en-US" dirty="0"/>
+              <a:t>Drawing on best practices from the literature in health risk communication [22,39,49], we develop explanation methods that focus on explaining the odds of a negative event occurring by contextualizing privacy guarantees in terms of outcomes. . In line with research [75] finding that people reason more effectively about the odds of a risk when framed as frequencies versus percentages …</a:t>
+            </a:r>
+          </a:p>
+          <a:p>
+            <a:endParaRPr lang="en-US" dirty="0"/>
+          </a:p>
+          <a:p>
+            <a:r>
+              <a:rPr lang="en-US" dirty="0"/>
               <a:t>The manager compares posterior probabilities of the employee’s response given the DP output to determine a maximum likelihood estimate (MLE). Let the output of the DP mechanism be r. The manager compares </a:t>
             </a:r>
             <a:r>
@@ -1277,7 +1478,7 @@
           <a:p>
             <a:r>
               <a:rPr lang="en-US" dirty="0"/>
-              <a:t>Explanation method x Epsilon value x optional/mandatory</a:t>
+              <a:t>Research has found that icon arrays—a frequency-framed visualization approach (Figure 1b)— sometimes help people with low-numeracy skills</a:t>
             </a:r>
           </a:p>
         </p:txBody>
@@ -1299,7 +1500,7 @@
           <a:p>
             <a:fld id="{C123C96B-2B3F-7242-90A1-56E5F222F20D}" type="slidenum">
               <a:rPr lang="en-US" smtClean="0"/>
-              <a:t>14</a:t>
+              <a:t>12</a:t>
             </a:fld>
             <a:endParaRPr lang="en-US"/>
           </a:p>
@@ -1308,7 +1509,7 @@
     </p:spTree>
     <p:extLst>
       <p:ext uri="{BB962C8B-B14F-4D97-AF65-F5344CB8AC3E}">
-        <p14:creationId xmlns:p14="http://schemas.microsoft.com/office/powerpoint/2010/main" val="450995488"/>
+        <p14:creationId xmlns:p14="http://schemas.microsoft.com/office/powerpoint/2010/main" val="3684397809"/>
       </p:ext>
     </p:extLst>
   </p:cSld>
@@ -1364,7 +1565,7 @@
           <a:p>
             <a:r>
               <a:rPr lang="en-US" dirty="0"/>
-              <a:t>Compared to the Xiong et al. Control, over 2x, nearly 2x, over 4x as likely to share data when given Odds-Based Text, Odds-Based Visual, &amp; Example-Based respectively</a:t>
+              <a:t>Drawing on prior work in S&amp;P showing that concrete examples improve user comprehension of privacy enhancing technologies and secure behavior</a:t>
             </a:r>
           </a:p>
           <a:p>
@@ -1373,7 +1574,7 @@
           <a:p>
             <a:r>
               <a:rPr lang="en-US" dirty="0"/>
-              <a:t>Decreased willingness to share as privacy strength decreases</a:t>
+              <a:t>Marian Harbach, Markus Hettig, Susanne Weber, and Matthew Smith. Using personal examples to improve risk communication for security &amp; privacy decisions. In Proceedings of the SIGCHI Conference on Human Factors in Computing Systems, pages 2647–2656, 2014.</a:t>
             </a:r>
           </a:p>
         </p:txBody>
@@ -1395,7 +1596,7 @@
           <a:p>
             <a:fld id="{C123C96B-2B3F-7242-90A1-56E5F222F20D}" type="slidenum">
               <a:rPr lang="en-US" smtClean="0"/>
-              <a:t>15</a:t>
+              <a:t>13</a:t>
             </a:fld>
             <a:endParaRPr lang="en-US"/>
           </a:p>
@@ -1404,7 +1605,7 @@
     </p:spTree>
     <p:extLst>
       <p:ext uri="{BB962C8B-B14F-4D97-AF65-F5344CB8AC3E}">
-        <p14:creationId xmlns:p14="http://schemas.microsoft.com/office/powerpoint/2010/main" val="3131663244"/>
+        <p14:creationId xmlns:p14="http://schemas.microsoft.com/office/powerpoint/2010/main" val="3658500215"/>
       </p:ext>
     </p:extLst>
   </p:cSld>
@@ -1460,19 +1661,7 @@
           <a:p>
             <a:r>
               <a:rPr lang="en-US" dirty="0"/>
-              <a:t>Over 2x as likely to answer an additional objective risk comprehension question correctly with Odds-Based Visual vs. Deterministic Control </a:t>
-            </a:r>
-          </a:p>
-          <a:p>
-            <a:r>
-              <a:rPr lang="en-US" dirty="0"/>
-              <a:t>Negative effect of our Sample Reports (O.R. = 0.32) </a:t>
-            </a:r>
-          </a:p>
-          <a:p>
-            <a:r>
-              <a:rPr lang="en-US" dirty="0"/>
-              <a:t>No significant effect of Odds-Based Text</a:t>
+              <a:t>Explanation method x Epsilon value x optional/mandatory</a:t>
             </a:r>
           </a:p>
         </p:txBody>
@@ -1494,7 +1683,7 @@
           <a:p>
             <a:fld id="{C123C96B-2B3F-7242-90A1-56E5F222F20D}" type="slidenum">
               <a:rPr lang="en-US" smtClean="0"/>
-              <a:t>16</a:t>
+              <a:t>14</a:t>
             </a:fld>
             <a:endParaRPr lang="en-US"/>
           </a:p>
@@ -1503,7 +1692,7 @@
     </p:spTree>
     <p:extLst>
       <p:ext uri="{BB962C8B-B14F-4D97-AF65-F5344CB8AC3E}">
-        <p14:creationId xmlns:p14="http://schemas.microsoft.com/office/powerpoint/2010/main" val="3760300140"/>
+        <p14:creationId xmlns:p14="http://schemas.microsoft.com/office/powerpoint/2010/main" val="450995488"/>
       </p:ext>
     </p:extLst>
   </p:cSld>
@@ -1557,16 +1746,19 @@
           <a:bodyPr/>
           <a:lstStyle/>
           <a:p>
-            <a:pPr marL="0" indent="0">
-              <a:buNone/>
-            </a:pPr>
-            <a:r>
-              <a:rPr lang="en-US" dirty="0"/>
-              <a:t>Compared to Sample Reports, Odds-Based Text and Odds-Based Visual improved subjective privacy understanding (O.R. = 1.7; 1.5) </a:t>
+            <a:r>
+              <a:rPr lang="en-US" dirty="0"/>
+              <a:t>Compared to the Xiong et al. Control, over 2x, nearly 2x, over 4x as likely to share data when given Odds-Based Text, Odds-Based Visual, &amp; Example-Based respectively</a:t>
             </a:r>
           </a:p>
           <a:p>
             <a:endParaRPr lang="en-US" dirty="0"/>
+          </a:p>
+          <a:p>
+            <a:r>
+              <a:rPr lang="en-US" dirty="0"/>
+              <a:t>Decreased willingness to share as privacy strength decreases</a:t>
+            </a:r>
           </a:p>
         </p:txBody>
       </p:sp>
@@ -1587,7 +1779,7 @@
           <a:p>
             <a:fld id="{C123C96B-2B3F-7242-90A1-56E5F222F20D}" type="slidenum">
               <a:rPr lang="en-US" smtClean="0"/>
-              <a:t>17</a:t>
+              <a:t>15</a:t>
             </a:fld>
             <a:endParaRPr lang="en-US"/>
           </a:p>
@@ -1596,7 +1788,7 @@
     </p:spTree>
     <p:extLst>
       <p:ext uri="{BB962C8B-B14F-4D97-AF65-F5344CB8AC3E}">
-        <p14:creationId xmlns:p14="http://schemas.microsoft.com/office/powerpoint/2010/main" val="1683729281"/>
+        <p14:creationId xmlns:p14="http://schemas.microsoft.com/office/powerpoint/2010/main" val="3131663244"/>
       </p:ext>
     </p:extLst>
   </p:cSld>
@@ -5283,250 +5475,6 @@
                       </p:childTnLst>
                     </p:cTn>
                   </p:par>
-                  <p:par>
-                    <p:cTn id="23" fill="hold">
-                      <p:stCondLst>
-                        <p:cond delay="indefinite"/>
-                      </p:stCondLst>
-                      <p:childTnLst>
-                        <p:par>
-                          <p:cTn id="24" fill="hold">
-                            <p:stCondLst>
-                              <p:cond delay="0"/>
-                            </p:stCondLst>
-                            <p:childTnLst>
-                              <p:par>
-                                <p:cTn id="25" presetID="9" presetClass="entr" presetSubtype="0" fill="hold" grpId="1" nodeType="clickEffect">
-                                  <p:stCondLst>
-                                    <p:cond delay="0"/>
-                                  </p:stCondLst>
-                                  <p:childTnLst>
-                                    <p:set>
-                                      <p:cBhvr>
-                                        <p:cTn id="26" dur="1" fill="hold">
-                                          <p:stCondLst>
-                                            <p:cond delay="0"/>
-                                          </p:stCondLst>
-                                        </p:cTn>
-                                        <p:tgtEl>
-                                          <p:spTgt spid="3">
-                                            <p:txEl>
-                                              <p:pRg st="0" end="0"/>
-                                            </p:txEl>
-                                          </p:spTgt>
-                                        </p:tgtEl>
-                                        <p:attrNameLst>
-                                          <p:attrName>style.visibility</p:attrName>
-                                        </p:attrNameLst>
-                                      </p:cBhvr>
-                                      <p:to>
-                                        <p:strVal val="visible"/>
-                                      </p:to>
-                                    </p:set>
-                                    <p:animEffect transition="in" filter="dissolve">
-                                      <p:cBhvr>
-                                        <p:cTn id="27" dur="500"/>
-                                        <p:tgtEl>
-                                          <p:spTgt spid="3">
-                                            <p:txEl>
-                                              <p:pRg st="0" end="0"/>
-                                            </p:txEl>
-                                          </p:spTgt>
-                                        </p:tgtEl>
-                                      </p:cBhvr>
-                                    </p:animEffect>
-                                  </p:childTnLst>
-                                </p:cTn>
-                              </p:par>
-                            </p:childTnLst>
-                          </p:cTn>
-                        </p:par>
-                      </p:childTnLst>
-                    </p:cTn>
-                  </p:par>
-                  <p:par>
-                    <p:cTn id="28" fill="hold">
-                      <p:stCondLst>
-                        <p:cond delay="indefinite"/>
-                      </p:stCondLst>
-                      <p:childTnLst>
-                        <p:par>
-                          <p:cTn id="29" fill="hold">
-                            <p:stCondLst>
-                              <p:cond delay="0"/>
-                            </p:stCondLst>
-                            <p:childTnLst>
-                              <p:par>
-                                <p:cTn id="30" presetID="9" presetClass="entr" presetSubtype="0" fill="hold" grpId="1" nodeType="clickEffect">
-                                  <p:stCondLst>
-                                    <p:cond delay="0"/>
-                                  </p:stCondLst>
-                                  <p:childTnLst>
-                                    <p:set>
-                                      <p:cBhvr>
-                                        <p:cTn id="31" dur="1" fill="hold">
-                                          <p:stCondLst>
-                                            <p:cond delay="0"/>
-                                          </p:stCondLst>
-                                        </p:cTn>
-                                        <p:tgtEl>
-                                          <p:spTgt spid="3">
-                                            <p:txEl>
-                                              <p:pRg st="1" end="1"/>
-                                            </p:txEl>
-                                          </p:spTgt>
-                                        </p:tgtEl>
-                                        <p:attrNameLst>
-                                          <p:attrName>style.visibility</p:attrName>
-                                        </p:attrNameLst>
-                                      </p:cBhvr>
-                                      <p:to>
-                                        <p:strVal val="visible"/>
-                                      </p:to>
-                                    </p:set>
-                                    <p:animEffect transition="in" filter="dissolve">
-                                      <p:cBhvr>
-                                        <p:cTn id="32" dur="500"/>
-                                        <p:tgtEl>
-                                          <p:spTgt spid="3">
-                                            <p:txEl>
-                                              <p:pRg st="1" end="1"/>
-                                            </p:txEl>
-                                          </p:spTgt>
-                                        </p:tgtEl>
-                                      </p:cBhvr>
-                                    </p:animEffect>
-                                  </p:childTnLst>
-                                </p:cTn>
-                              </p:par>
-                            </p:childTnLst>
-                          </p:cTn>
-                        </p:par>
-                      </p:childTnLst>
-                    </p:cTn>
-                  </p:par>
-                  <p:par>
-                    <p:cTn id="33" fill="hold">
-                      <p:stCondLst>
-                        <p:cond delay="indefinite"/>
-                      </p:stCondLst>
-                      <p:childTnLst>
-                        <p:par>
-                          <p:cTn id="34" fill="hold">
-                            <p:stCondLst>
-                              <p:cond delay="0"/>
-                            </p:stCondLst>
-                            <p:childTnLst>
-                              <p:par>
-                                <p:cTn id="35" presetID="9" presetClass="entr" presetSubtype="0" fill="hold" grpId="1" nodeType="clickEffect">
-                                  <p:stCondLst>
-                                    <p:cond delay="0"/>
-                                  </p:stCondLst>
-                                  <p:childTnLst>
-                                    <p:set>
-                                      <p:cBhvr>
-                                        <p:cTn id="36" dur="1" fill="hold">
-                                          <p:stCondLst>
-                                            <p:cond delay="0"/>
-                                          </p:stCondLst>
-                                        </p:cTn>
-                                        <p:tgtEl>
-                                          <p:spTgt spid="3">
-                                            <p:txEl>
-                                              <p:pRg st="2" end="2"/>
-                                            </p:txEl>
-                                          </p:spTgt>
-                                        </p:tgtEl>
-                                        <p:attrNameLst>
-                                          <p:attrName>style.visibility</p:attrName>
-                                        </p:attrNameLst>
-                                      </p:cBhvr>
-                                      <p:to>
-                                        <p:strVal val="visible"/>
-                                      </p:to>
-                                    </p:set>
-                                    <p:animEffect transition="in" filter="dissolve">
-                                      <p:cBhvr>
-                                        <p:cTn id="37" dur="500"/>
-                                        <p:tgtEl>
-                                          <p:spTgt spid="3">
-                                            <p:txEl>
-                                              <p:pRg st="2" end="2"/>
-                                            </p:txEl>
-                                          </p:spTgt>
-                                        </p:tgtEl>
-                                      </p:cBhvr>
-                                    </p:animEffect>
-                                  </p:childTnLst>
-                                </p:cTn>
-                              </p:par>
-                            </p:childTnLst>
-                          </p:cTn>
-                        </p:par>
-                      </p:childTnLst>
-                    </p:cTn>
-                  </p:par>
-                  <p:par>
-                    <p:cTn id="38" fill="hold">
-                      <p:stCondLst>
-                        <p:cond delay="indefinite"/>
-                      </p:stCondLst>
-                      <p:childTnLst>
-                        <p:par>
-                          <p:cTn id="39" fill="hold">
-                            <p:stCondLst>
-                              <p:cond delay="0"/>
-                            </p:stCondLst>
-                            <p:childTnLst>
-                              <p:par>
-                                <p:cTn id="40" presetID="9" presetClass="entr" presetSubtype="0" fill="hold" grpId="1" nodeType="clickEffect">
-                                  <p:stCondLst>
-                                    <p:cond delay="0"/>
-                                  </p:stCondLst>
-                                  <p:childTnLst>
-                                    <p:set>
-                                      <p:cBhvr>
-                                        <p:cTn id="41" dur="1" fill="hold">
-                                          <p:stCondLst>
-                                            <p:cond delay="0"/>
-                                          </p:stCondLst>
-                                        </p:cTn>
-                                        <p:tgtEl>
-                                          <p:spTgt spid="3">
-                                            <p:txEl>
-                                              <p:pRg st="3" end="3"/>
-                                            </p:txEl>
-                                          </p:spTgt>
-                                        </p:tgtEl>
-                                        <p:attrNameLst>
-                                          <p:attrName>style.visibility</p:attrName>
-                                        </p:attrNameLst>
-                                      </p:cBhvr>
-                                      <p:to>
-                                        <p:strVal val="visible"/>
-                                      </p:to>
-                                    </p:set>
-                                    <p:animEffect transition="in" filter="dissolve">
-                                      <p:cBhvr>
-                                        <p:cTn id="42" dur="500"/>
-                                        <p:tgtEl>
-                                          <p:spTgt spid="3">
-                                            <p:txEl>
-                                              <p:pRg st="3" end="3"/>
-                                            </p:txEl>
-                                          </p:spTgt>
-                                        </p:tgtEl>
-                                      </p:cBhvr>
-                                    </p:animEffect>
-                                  </p:childTnLst>
-                                </p:cTn>
-                              </p:par>
-                            </p:childTnLst>
-                          </p:cTn>
-                        </p:par>
-                      </p:childTnLst>
-                    </p:cTn>
-                  </p:par>
                 </p:childTnLst>
               </p:cTn>
               <p:prevCondLst>
@@ -5550,7 +5498,6 @@
     </p:tnLst>
     <p:bldLst>
       <p:bldP spid="3" grpId="0" build="p"/>
-      <p:bldP spid="3" grpId="1" build="p"/>
     </p:bldLst>
   </p:timing>
 </p:sld>
@@ -5662,7 +5609,7 @@
         </p:blipFill>
         <p:spPr>
           <a:xfrm>
-            <a:off x="4311650" y="5128887"/>
+            <a:off x="4311650" y="1296591"/>
             <a:ext cx="3568700" cy="1028700"/>
           </a:xfrm>
           <a:prstGeom prst="rect">
@@ -5680,6 +5627,9 @@
   <p:clrMapOvr>
     <a:masterClrMapping/>
   </p:clrMapOvr>
+  <p:transition spd="med">
+    <p:pull/>
+  </p:transition>
   <p:timing>
     <p:tnLst>
       <p:par>
@@ -5835,7 +5785,7 @@
           </p:nvPr>
         </p:nvPicPr>
         <p:blipFill>
-          <a:blip r:embed="rId2"/>
+          <a:blip r:embed="rId3"/>
           <a:stretch>
             <a:fillRect/>
           </a:stretch>
@@ -5860,6 +5810,9 @@
   <p:clrMapOvr>
     <a:masterClrMapping/>
   </p:clrMapOvr>
+  <p:transition spd="med">
+    <p:pull/>
+  </p:transition>
 </p:sld>
 </file>
 
@@ -5931,7 +5884,7 @@
           </p:nvPr>
         </p:nvPicPr>
         <p:blipFill>
-          <a:blip r:embed="rId2"/>
+          <a:blip r:embed="rId3"/>
           <a:stretch>
             <a:fillRect/>
           </a:stretch>
@@ -5956,6 +5909,9 @@
   <p:clrMapOvr>
     <a:masterClrMapping/>
   </p:clrMapOvr>
+  <p:transition spd="med">
+    <p:pull/>
+  </p:transition>
 </p:sld>
 </file>
 
@@ -5998,7 +5954,7 @@
         </p:blipFill>
         <p:spPr>
           <a:xfrm>
-            <a:off x="7916979" y="1468334"/>
+            <a:off x="7777497" y="1468334"/>
             <a:ext cx="4039908" cy="4366665"/>
           </a:xfrm>
           <a:prstGeom prst="rect">
@@ -6112,7 +6068,7 @@
         </p:blipFill>
         <p:spPr>
           <a:xfrm>
-            <a:off x="3762531" y="1468333"/>
+            <a:off x="3623049" y="1468333"/>
             <a:ext cx="4039908" cy="4366665"/>
           </a:xfrm>
           <a:prstGeom prst="rect">
@@ -6142,7 +6098,7 @@
         </p:blipFill>
         <p:spPr>
           <a:xfrm>
-            <a:off x="7916979" y="1690688"/>
+            <a:off x="7777497" y="1690688"/>
             <a:ext cx="4039908" cy="4538662"/>
           </a:xfrm>
           <a:prstGeom prst="rect">
@@ -6234,6 +6190,9 @@
   <p:clrMapOvr>
     <a:masterClrMapping/>
   </p:clrMapOvr>
+  <p:transition spd="slow">
+    <p:push dir="u"/>
+  </p:transition>
   <p:timing>
     <p:tnLst>
       <p:par>
@@ -6785,6 +6744,18 @@
   <p:clrMapOvr>
     <a:masterClrMapping/>
   </p:clrMapOvr>
+  <mc:AlternateContent xmlns:mc="http://schemas.openxmlformats.org/markup-compatibility/2006">
+    <mc:Choice xmlns:p14="http://schemas.microsoft.com/office/powerpoint/2010/main" Requires="p14">
+      <p:transition spd="slow" p14:dur="800">
+        <p:circle/>
+      </p:transition>
+    </mc:Choice>
+    <mc:Fallback>
+      <p:transition spd="slow">
+        <p:circle/>
+      </p:transition>
+    </mc:Fallback>
+  </mc:AlternateContent>
 </p:sld>
 </file>
 
@@ -7059,6 +7030,9 @@
   <p:clrMapOvr>
     <a:masterClrMapping/>
   </p:clrMapOvr>
+  <p:transition spd="slow">
+    <p:wipe/>
+  </p:transition>
 </p:sld>
 </file>
 
@@ -7407,6 +7381,9 @@
   <p:clrMapOvr>
     <a:masterClrMapping/>
   </p:clrMapOvr>
+  <p:transition spd="slow">
+    <p:wipe/>
+  </p:transition>
 </p:sld>
 </file>
 
@@ -7510,6 +7487,9 @@
   <p:clrMapOvr>
     <a:masterClrMapping/>
   </p:clrMapOvr>
+  <p:transition spd="slow">
+    <p:wipe/>
+  </p:transition>
 </p:sld>
 </file>
 
@@ -7606,6 +7586,18 @@
   <p:clrMapOvr>
     <a:masterClrMapping/>
   </p:clrMapOvr>
+  <mc:AlternateContent xmlns:mc="http://schemas.openxmlformats.org/markup-compatibility/2006">
+    <mc:Choice xmlns:p14="http://schemas.microsoft.com/office/powerpoint/2010/main" Requires="p14">
+      <p:transition spd="slow" p14:dur="800">
+        <p:circle/>
+      </p:transition>
+    </mc:Choice>
+    <mc:Fallback>
+      <p:transition spd="slow">
+        <p:circle/>
+      </p:transition>
+    </mc:Fallback>
+  </mc:AlternateContent>
 </p:sld>
 </file>
 
@@ -7955,6 +7947,9 @@
   <p:clrMapOvr>
     <a:masterClrMapping/>
   </p:clrMapOvr>
+  <p:transition spd="slow">
+    <p:push dir="u"/>
+  </p:transition>
 </p:sld>
 </file>
 
@@ -8059,6 +8054,9 @@
   <p:clrMapOvr>
     <a:masterClrMapping/>
   </p:clrMapOvr>
+  <p:transition spd="med">
+    <p:pull/>
+  </p:transition>
 </p:sld>
 </file>
 
@@ -8186,6 +8184,9 @@
   <p:clrMapOvr>
     <a:masterClrMapping/>
   </p:clrMapOvr>
+  <p:transition spd="slow">
+    <p:push dir="u"/>
+  </p:transition>
 </p:sld>
 </file>
 
@@ -8327,6 +8328,9 @@
   <p:clrMapOvr>
     <a:masterClrMapping/>
   </p:clrMapOvr>
+  <p:transition spd="slow">
+    <p:wipe dir="r"/>
+  </p:transition>
 </p:sld>
 </file>
 
@@ -8587,6 +8591,329 @@
   <p:clrMapOvr>
     <a:masterClrMapping/>
   </p:clrMapOvr>
+  <p:transition spd="slow">
+    <p:wipe dir="r"/>
+  </p:transition>
+  <p:timing>
+    <p:tnLst>
+      <p:par>
+        <p:cTn id="1" dur="indefinite" restart="never" nodeType="tmRoot">
+          <p:childTnLst>
+            <p:seq concurrent="1" nextAc="seek">
+              <p:cTn id="2" dur="indefinite" nodeType="mainSeq">
+                <p:childTnLst>
+                  <p:par>
+                    <p:cTn id="3" fill="hold">
+                      <p:stCondLst>
+                        <p:cond delay="indefinite"/>
+                      </p:stCondLst>
+                      <p:childTnLst>
+                        <p:par>
+                          <p:cTn id="4" fill="hold">
+                            <p:stCondLst>
+                              <p:cond delay="0"/>
+                            </p:stCondLst>
+                            <p:childTnLst>
+                              <p:par>
+                                <p:cTn id="5" presetID="9" presetClass="entr" presetSubtype="0" fill="hold" grpId="0" nodeType="clickEffect">
+                                  <p:stCondLst>
+                                    <p:cond delay="0"/>
+                                  </p:stCondLst>
+                                  <p:childTnLst>
+                                    <p:set>
+                                      <p:cBhvr>
+                                        <p:cTn id="6" dur="1" fill="hold">
+                                          <p:stCondLst>
+                                            <p:cond delay="0"/>
+                                          </p:stCondLst>
+                                        </p:cTn>
+                                        <p:tgtEl>
+                                          <p:spTgt spid="5">
+                                            <p:txEl>
+                                              <p:pRg st="1" end="1"/>
+                                            </p:txEl>
+                                          </p:spTgt>
+                                        </p:tgtEl>
+                                        <p:attrNameLst>
+                                          <p:attrName>style.visibility</p:attrName>
+                                        </p:attrNameLst>
+                                      </p:cBhvr>
+                                      <p:to>
+                                        <p:strVal val="visible"/>
+                                      </p:to>
+                                    </p:set>
+                                    <p:animEffect transition="in" filter="dissolve">
+                                      <p:cBhvr>
+                                        <p:cTn id="7" dur="500"/>
+                                        <p:tgtEl>
+                                          <p:spTgt spid="5">
+                                            <p:txEl>
+                                              <p:pRg st="1" end="1"/>
+                                            </p:txEl>
+                                          </p:spTgt>
+                                        </p:tgtEl>
+                                      </p:cBhvr>
+                                    </p:animEffect>
+                                  </p:childTnLst>
+                                </p:cTn>
+                              </p:par>
+                            </p:childTnLst>
+                          </p:cTn>
+                        </p:par>
+                      </p:childTnLst>
+                    </p:cTn>
+                  </p:par>
+                  <p:par>
+                    <p:cTn id="8" fill="hold">
+                      <p:stCondLst>
+                        <p:cond delay="indefinite"/>
+                      </p:stCondLst>
+                      <p:childTnLst>
+                        <p:par>
+                          <p:cTn id="9" fill="hold">
+                            <p:stCondLst>
+                              <p:cond delay="0"/>
+                            </p:stCondLst>
+                            <p:childTnLst>
+                              <p:par>
+                                <p:cTn id="10" presetID="9" presetClass="entr" presetSubtype="0" fill="hold" grpId="0" nodeType="clickEffect">
+                                  <p:stCondLst>
+                                    <p:cond delay="0"/>
+                                  </p:stCondLst>
+                                  <p:childTnLst>
+                                    <p:set>
+                                      <p:cBhvr>
+                                        <p:cTn id="11" dur="1" fill="hold">
+                                          <p:stCondLst>
+                                            <p:cond delay="0"/>
+                                          </p:stCondLst>
+                                        </p:cTn>
+                                        <p:tgtEl>
+                                          <p:spTgt spid="5">
+                                            <p:txEl>
+                                              <p:pRg st="3" end="3"/>
+                                            </p:txEl>
+                                          </p:spTgt>
+                                        </p:tgtEl>
+                                        <p:attrNameLst>
+                                          <p:attrName>style.visibility</p:attrName>
+                                        </p:attrNameLst>
+                                      </p:cBhvr>
+                                      <p:to>
+                                        <p:strVal val="visible"/>
+                                      </p:to>
+                                    </p:set>
+                                    <p:animEffect transition="in" filter="dissolve">
+                                      <p:cBhvr>
+                                        <p:cTn id="12" dur="500"/>
+                                        <p:tgtEl>
+                                          <p:spTgt spid="5">
+                                            <p:txEl>
+                                              <p:pRg st="3" end="3"/>
+                                            </p:txEl>
+                                          </p:spTgt>
+                                        </p:tgtEl>
+                                      </p:cBhvr>
+                                    </p:animEffect>
+                                  </p:childTnLst>
+                                </p:cTn>
+                              </p:par>
+                              <p:par>
+                                <p:cTn id="13" presetID="9" presetClass="entr" presetSubtype="0" fill="hold" grpId="0" nodeType="withEffect">
+                                  <p:stCondLst>
+                                    <p:cond delay="0"/>
+                                  </p:stCondLst>
+                                  <p:childTnLst>
+                                    <p:set>
+                                      <p:cBhvr>
+                                        <p:cTn id="14" dur="1" fill="hold">
+                                          <p:stCondLst>
+                                            <p:cond delay="0"/>
+                                          </p:stCondLst>
+                                        </p:cTn>
+                                        <p:tgtEl>
+                                          <p:spTgt spid="5">
+                                            <p:txEl>
+                                              <p:pRg st="4" end="4"/>
+                                            </p:txEl>
+                                          </p:spTgt>
+                                        </p:tgtEl>
+                                        <p:attrNameLst>
+                                          <p:attrName>style.visibility</p:attrName>
+                                        </p:attrNameLst>
+                                      </p:cBhvr>
+                                      <p:to>
+                                        <p:strVal val="visible"/>
+                                      </p:to>
+                                    </p:set>
+                                    <p:animEffect transition="in" filter="dissolve">
+                                      <p:cBhvr>
+                                        <p:cTn id="15" dur="500"/>
+                                        <p:tgtEl>
+                                          <p:spTgt spid="5">
+                                            <p:txEl>
+                                              <p:pRg st="4" end="4"/>
+                                            </p:txEl>
+                                          </p:spTgt>
+                                        </p:tgtEl>
+                                      </p:cBhvr>
+                                    </p:animEffect>
+                                  </p:childTnLst>
+                                </p:cTn>
+                              </p:par>
+                            </p:childTnLst>
+                          </p:cTn>
+                        </p:par>
+                      </p:childTnLst>
+                    </p:cTn>
+                  </p:par>
+                  <p:par>
+                    <p:cTn id="16" fill="hold">
+                      <p:stCondLst>
+                        <p:cond delay="indefinite"/>
+                      </p:stCondLst>
+                      <p:childTnLst>
+                        <p:par>
+                          <p:cTn id="17" fill="hold">
+                            <p:stCondLst>
+                              <p:cond delay="0"/>
+                            </p:stCondLst>
+                            <p:childTnLst>
+                              <p:par>
+                                <p:cTn id="18" presetID="9" presetClass="entr" presetSubtype="0" fill="hold" grpId="0" nodeType="clickEffect">
+                                  <p:stCondLst>
+                                    <p:cond delay="0"/>
+                                  </p:stCondLst>
+                                  <p:childTnLst>
+                                    <p:set>
+                                      <p:cBhvr>
+                                        <p:cTn id="19" dur="1" fill="hold">
+                                          <p:stCondLst>
+                                            <p:cond delay="0"/>
+                                          </p:stCondLst>
+                                        </p:cTn>
+                                        <p:tgtEl>
+                                          <p:spTgt spid="5">
+                                            <p:txEl>
+                                              <p:pRg st="5" end="5"/>
+                                            </p:txEl>
+                                          </p:spTgt>
+                                        </p:tgtEl>
+                                        <p:attrNameLst>
+                                          <p:attrName>style.visibility</p:attrName>
+                                        </p:attrNameLst>
+                                      </p:cBhvr>
+                                      <p:to>
+                                        <p:strVal val="visible"/>
+                                      </p:to>
+                                    </p:set>
+                                    <p:animEffect transition="in" filter="dissolve">
+                                      <p:cBhvr>
+                                        <p:cTn id="20" dur="500"/>
+                                        <p:tgtEl>
+                                          <p:spTgt spid="5">
+                                            <p:txEl>
+                                              <p:pRg st="5" end="5"/>
+                                            </p:txEl>
+                                          </p:spTgt>
+                                        </p:tgtEl>
+                                      </p:cBhvr>
+                                    </p:animEffect>
+                                  </p:childTnLst>
+                                </p:cTn>
+                              </p:par>
+                            </p:childTnLst>
+                          </p:cTn>
+                        </p:par>
+                      </p:childTnLst>
+                    </p:cTn>
+                  </p:par>
+                  <p:par>
+                    <p:cTn id="21" fill="hold">
+                      <p:stCondLst>
+                        <p:cond delay="indefinite"/>
+                      </p:stCondLst>
+                      <p:childTnLst>
+                        <p:par>
+                          <p:cTn id="22" fill="hold">
+                            <p:stCondLst>
+                              <p:cond delay="0"/>
+                            </p:stCondLst>
+                            <p:childTnLst>
+                              <p:par>
+                                <p:cTn id="23" presetID="9" presetClass="entr" presetSubtype="0" fill="hold" grpId="0" nodeType="clickEffect">
+                                  <p:stCondLst>
+                                    <p:cond delay="0"/>
+                                  </p:stCondLst>
+                                  <p:childTnLst>
+                                    <p:set>
+                                      <p:cBhvr>
+                                        <p:cTn id="24" dur="1" fill="hold">
+                                          <p:stCondLst>
+                                            <p:cond delay="0"/>
+                                          </p:stCondLst>
+                                        </p:cTn>
+                                        <p:tgtEl>
+                                          <p:spTgt spid="5">
+                                            <p:txEl>
+                                              <p:pRg st="6" end="6"/>
+                                            </p:txEl>
+                                          </p:spTgt>
+                                        </p:tgtEl>
+                                        <p:attrNameLst>
+                                          <p:attrName>style.visibility</p:attrName>
+                                        </p:attrNameLst>
+                                      </p:cBhvr>
+                                      <p:to>
+                                        <p:strVal val="visible"/>
+                                      </p:to>
+                                    </p:set>
+                                    <p:animEffect transition="in" filter="dissolve">
+                                      <p:cBhvr>
+                                        <p:cTn id="25" dur="500"/>
+                                        <p:tgtEl>
+                                          <p:spTgt spid="5">
+                                            <p:txEl>
+                                              <p:pRg st="6" end="6"/>
+                                            </p:txEl>
+                                          </p:spTgt>
+                                        </p:tgtEl>
+                                      </p:cBhvr>
+                                    </p:animEffect>
+                                  </p:childTnLst>
+                                </p:cTn>
+                              </p:par>
+                            </p:childTnLst>
+                          </p:cTn>
+                        </p:par>
+                      </p:childTnLst>
+                    </p:cTn>
+                  </p:par>
+                </p:childTnLst>
+              </p:cTn>
+              <p:prevCondLst>
+                <p:cond evt="onPrev" delay="0">
+                  <p:tgtEl>
+                    <p:sldTgt/>
+                  </p:tgtEl>
+                </p:cond>
+              </p:prevCondLst>
+              <p:nextCondLst>
+                <p:cond evt="onNext" delay="0">
+                  <p:tgtEl>
+                    <p:sldTgt/>
+                  </p:tgtEl>
+                </p:cond>
+              </p:nextCondLst>
+            </p:seq>
+          </p:childTnLst>
+        </p:cTn>
+      </p:par>
+    </p:tnLst>
+    <p:bldLst>
+      <p:bldP spid="5" grpId="0" uiExpand="1" build="p"/>
+    </p:bldLst>
+  </p:timing>
 </p:sld>
 </file>
 
@@ -9748,170 +10075,212 @@
           </a:graphicData>
         </a:graphic>
       </p:graphicFrame>
-      <p:cxnSp>
-        <p:nvCxnSpPr>
-          <p:cNvPr id="11" name="Straight Arrow Connector 10">
+      <p:grpSp>
+        <p:nvGrpSpPr>
+          <p:cNvPr id="17" name="Group 16">
             <a:extLst>
               <a:ext uri="{FF2B5EF4-FFF2-40B4-BE49-F238E27FC236}">
-                <a16:creationId xmlns:a16="http://schemas.microsoft.com/office/drawing/2014/main" id="{FBEADF76-4FAD-B326-AF0C-8CEFFA947E01}"/>
+                <a16:creationId xmlns:a16="http://schemas.microsoft.com/office/drawing/2014/main" id="{C5E0631B-7C3A-4C5A-98D6-3FDA92D35B27}"/>
               </a:ext>
             </a:extLst>
           </p:cNvPr>
-          <p:cNvCxnSpPr/>
+          <p:cNvGrpSpPr/>
           <p:nvPr/>
-        </p:nvCxnSpPr>
-        <p:spPr>
+        </p:nvGrpSpPr>
+        <p:grpSpPr>
           <a:xfrm>
-            <a:off x="838200" y="5881129"/>
-            <a:ext cx="4895273" cy="0"/>
+            <a:off x="838200" y="5557964"/>
+            <a:ext cx="4895273" cy="646331"/>
+            <a:chOff x="838200" y="5557964"/>
+            <a:chExt cx="4895273" cy="646331"/>
           </a:xfrm>
-          <a:prstGeom prst="straightConnector1">
-            <a:avLst/>
-          </a:prstGeom>
-          <a:ln w="38100">
-            <a:tailEnd type="triangle"/>
-          </a:ln>
-        </p:spPr>
-        <p:style>
-          <a:lnRef idx="1">
-            <a:schemeClr val="accent1"/>
-          </a:lnRef>
-          <a:fillRef idx="0">
-            <a:schemeClr val="accent1"/>
-          </a:fillRef>
-          <a:effectRef idx="0">
-            <a:schemeClr val="accent1"/>
-          </a:effectRef>
-          <a:fontRef idx="minor">
-            <a:schemeClr val="tx1"/>
-          </a:fontRef>
-        </p:style>
-      </p:cxnSp>
-      <p:cxnSp>
-        <p:nvCxnSpPr>
-          <p:cNvPr id="12" name="Straight Arrow Connector 11">
+        </p:grpSpPr>
+        <p:cxnSp>
+          <p:nvCxnSpPr>
+            <p:cNvPr id="11" name="Straight Arrow Connector 10">
+              <a:extLst>
+                <a:ext uri="{FF2B5EF4-FFF2-40B4-BE49-F238E27FC236}">
+                  <a16:creationId xmlns:a16="http://schemas.microsoft.com/office/drawing/2014/main" id="{FBEADF76-4FAD-B326-AF0C-8CEFFA947E01}"/>
+                </a:ext>
+              </a:extLst>
+            </p:cNvPr>
+            <p:cNvCxnSpPr/>
+            <p:nvPr/>
+          </p:nvCxnSpPr>
+          <p:spPr>
+            <a:xfrm>
+              <a:off x="838200" y="5881129"/>
+              <a:ext cx="4895273" cy="0"/>
+            </a:xfrm>
+            <a:prstGeom prst="straightConnector1">
+              <a:avLst/>
+            </a:prstGeom>
+            <a:ln w="38100">
+              <a:tailEnd type="triangle"/>
+            </a:ln>
+          </p:spPr>
+          <p:style>
+            <a:lnRef idx="1">
+              <a:schemeClr val="accent1"/>
+            </a:lnRef>
+            <a:fillRef idx="0">
+              <a:schemeClr val="accent1"/>
+            </a:fillRef>
+            <a:effectRef idx="0">
+              <a:schemeClr val="accent1"/>
+            </a:effectRef>
+            <a:fontRef idx="minor">
+              <a:schemeClr val="tx1"/>
+            </a:fontRef>
+          </p:style>
+        </p:cxnSp>
+        <p:sp>
+          <p:nvSpPr>
+            <p:cNvPr id="13" name="TextBox 12">
+              <a:extLst>
+                <a:ext uri="{FF2B5EF4-FFF2-40B4-BE49-F238E27FC236}">
+                  <a16:creationId xmlns:a16="http://schemas.microsoft.com/office/drawing/2014/main" id="{593E6204-53F0-64EC-0524-890C4C41AC58}"/>
+                </a:ext>
+              </a:extLst>
+            </p:cNvPr>
+            <p:cNvSpPr txBox="1"/>
+            <p:nvPr/>
+          </p:nvSpPr>
+          <p:spPr>
+            <a:xfrm>
+              <a:off x="2503282" y="5557964"/>
+              <a:ext cx="1565108" cy="646331"/>
+            </a:xfrm>
+            <a:prstGeom prst="rect">
+              <a:avLst/>
+            </a:prstGeom>
+            <a:noFill/>
+          </p:spPr>
+          <p:txBody>
+            <a:bodyPr wrap="none" rtlCol="0">
+              <a:spAutoFit/>
+            </a:bodyPr>
+            <a:lstStyle/>
+            <a:p>
+              <a:pPr algn="ctr"/>
+              <a:r>
+                <a:rPr lang="en-US" i="1" dirty="0"/>
+                <a:t>More accuracy</a:t>
+              </a:r>
+            </a:p>
+            <a:p>
+              <a:pPr algn="ctr"/>
+              <a:r>
+                <a:rPr lang="en-US" i="1" dirty="0"/>
+                <a:t>Less privacy</a:t>
+              </a:r>
+            </a:p>
+          </p:txBody>
+        </p:sp>
+      </p:grpSp>
+      <p:grpSp>
+        <p:nvGrpSpPr>
+          <p:cNvPr id="18" name="Group 17">
             <a:extLst>
               <a:ext uri="{FF2B5EF4-FFF2-40B4-BE49-F238E27FC236}">
-                <a16:creationId xmlns:a16="http://schemas.microsoft.com/office/drawing/2014/main" id="{61E2B35B-A3D0-B189-3F21-DD877A520F10}"/>
+                <a16:creationId xmlns:a16="http://schemas.microsoft.com/office/drawing/2014/main" id="{11C7AA80-0314-7116-E61E-36310933EF97}"/>
               </a:ext>
             </a:extLst>
           </p:cNvPr>
-          <p:cNvCxnSpPr/>
+          <p:cNvGrpSpPr/>
           <p:nvPr/>
-        </p:nvCxnSpPr>
-        <p:spPr>
+        </p:nvGrpSpPr>
+        <p:grpSpPr>
           <a:xfrm>
-            <a:off x="6277263" y="5863480"/>
-            <a:ext cx="4895273" cy="0"/>
+            <a:off x="6277263" y="5540314"/>
+            <a:ext cx="4895273" cy="646331"/>
+            <a:chOff x="6277263" y="5540314"/>
+            <a:chExt cx="4895273" cy="646331"/>
           </a:xfrm>
-          <a:prstGeom prst="straightConnector1">
-            <a:avLst/>
-          </a:prstGeom>
-          <a:ln w="38100">
-            <a:tailEnd type="triangle"/>
-          </a:ln>
-        </p:spPr>
-        <p:style>
-          <a:lnRef idx="1">
-            <a:schemeClr val="accent1"/>
-          </a:lnRef>
-          <a:fillRef idx="0">
-            <a:schemeClr val="accent1"/>
-          </a:fillRef>
-          <a:effectRef idx="0">
-            <a:schemeClr val="accent1"/>
-          </a:effectRef>
-          <a:fontRef idx="minor">
-            <a:schemeClr val="tx1"/>
-          </a:fontRef>
-        </p:style>
-      </p:cxnSp>
-      <p:sp>
-        <p:nvSpPr>
-          <p:cNvPr id="13" name="TextBox 12">
-            <a:extLst>
-              <a:ext uri="{FF2B5EF4-FFF2-40B4-BE49-F238E27FC236}">
-                <a16:creationId xmlns:a16="http://schemas.microsoft.com/office/drawing/2014/main" id="{593E6204-53F0-64EC-0524-890C4C41AC58}"/>
-              </a:ext>
-            </a:extLst>
-          </p:cNvPr>
-          <p:cNvSpPr txBox="1"/>
-          <p:nvPr/>
-        </p:nvSpPr>
-        <p:spPr>
-          <a:xfrm>
-            <a:off x="2503282" y="5557964"/>
-            <a:ext cx="1565108" cy="646331"/>
-          </a:xfrm>
-          <a:prstGeom prst="rect">
-            <a:avLst/>
-          </a:prstGeom>
-          <a:noFill/>
-        </p:spPr>
-        <p:txBody>
-          <a:bodyPr wrap="none" rtlCol="0">
-            <a:spAutoFit/>
-          </a:bodyPr>
-          <a:lstStyle/>
-          <a:p>
-            <a:pPr algn="ctr"/>
-            <a:r>
-              <a:rPr lang="en-US" i="1" dirty="0"/>
-              <a:t>More accuracy</a:t>
-            </a:r>
-          </a:p>
-          <a:p>
-            <a:pPr algn="ctr"/>
-            <a:r>
-              <a:rPr lang="en-US" i="1" dirty="0"/>
-              <a:t>Less privacy</a:t>
-            </a:r>
-          </a:p>
-        </p:txBody>
-      </p:sp>
-      <p:sp>
-        <p:nvSpPr>
-          <p:cNvPr id="14" name="TextBox 13">
-            <a:extLst>
-              <a:ext uri="{FF2B5EF4-FFF2-40B4-BE49-F238E27FC236}">
-                <a16:creationId xmlns:a16="http://schemas.microsoft.com/office/drawing/2014/main" id="{20F1F6AA-6B6A-5333-9616-93C6D904CCCC}"/>
-              </a:ext>
-            </a:extLst>
-          </p:cNvPr>
-          <p:cNvSpPr txBox="1"/>
-          <p:nvPr/>
-        </p:nvSpPr>
-        <p:spPr>
-          <a:xfrm>
-            <a:off x="7761082" y="5540314"/>
-            <a:ext cx="1565108" cy="646331"/>
-          </a:xfrm>
-          <a:prstGeom prst="rect">
-            <a:avLst/>
-          </a:prstGeom>
-          <a:noFill/>
-        </p:spPr>
-        <p:txBody>
-          <a:bodyPr wrap="none" rtlCol="0">
-            <a:spAutoFit/>
-          </a:bodyPr>
-          <a:lstStyle/>
-          <a:p>
-            <a:pPr algn="ctr"/>
-            <a:r>
-              <a:rPr lang="en-US" i="1" dirty="0"/>
-              <a:t>More accuracy</a:t>
-            </a:r>
-          </a:p>
-          <a:p>
-            <a:pPr algn="ctr"/>
-            <a:r>
-              <a:rPr lang="en-US" i="1" dirty="0"/>
-              <a:t>Less privacy</a:t>
-            </a:r>
-          </a:p>
-        </p:txBody>
-      </p:sp>
+        </p:grpSpPr>
+        <p:cxnSp>
+          <p:nvCxnSpPr>
+            <p:cNvPr id="12" name="Straight Arrow Connector 11">
+              <a:extLst>
+                <a:ext uri="{FF2B5EF4-FFF2-40B4-BE49-F238E27FC236}">
+                  <a16:creationId xmlns:a16="http://schemas.microsoft.com/office/drawing/2014/main" id="{61E2B35B-A3D0-B189-3F21-DD877A520F10}"/>
+                </a:ext>
+              </a:extLst>
+            </p:cNvPr>
+            <p:cNvCxnSpPr/>
+            <p:nvPr/>
+          </p:nvCxnSpPr>
+          <p:spPr>
+            <a:xfrm>
+              <a:off x="6277263" y="5863480"/>
+              <a:ext cx="4895273" cy="0"/>
+            </a:xfrm>
+            <a:prstGeom prst="straightConnector1">
+              <a:avLst/>
+            </a:prstGeom>
+            <a:ln w="38100">
+              <a:tailEnd type="triangle"/>
+            </a:ln>
+          </p:spPr>
+          <p:style>
+            <a:lnRef idx="1">
+              <a:schemeClr val="accent1"/>
+            </a:lnRef>
+            <a:fillRef idx="0">
+              <a:schemeClr val="accent1"/>
+            </a:fillRef>
+            <a:effectRef idx="0">
+              <a:schemeClr val="accent1"/>
+            </a:effectRef>
+            <a:fontRef idx="minor">
+              <a:schemeClr val="tx1"/>
+            </a:fontRef>
+          </p:style>
+        </p:cxnSp>
+        <p:sp>
+          <p:nvSpPr>
+            <p:cNvPr id="14" name="TextBox 13">
+              <a:extLst>
+                <a:ext uri="{FF2B5EF4-FFF2-40B4-BE49-F238E27FC236}">
+                  <a16:creationId xmlns:a16="http://schemas.microsoft.com/office/drawing/2014/main" id="{20F1F6AA-6B6A-5333-9616-93C6D904CCCC}"/>
+                </a:ext>
+              </a:extLst>
+            </p:cNvPr>
+            <p:cNvSpPr txBox="1"/>
+            <p:nvPr/>
+          </p:nvSpPr>
+          <p:spPr>
+            <a:xfrm>
+              <a:off x="7761082" y="5540314"/>
+              <a:ext cx="1565108" cy="646331"/>
+            </a:xfrm>
+            <a:prstGeom prst="rect">
+              <a:avLst/>
+            </a:prstGeom>
+            <a:noFill/>
+          </p:spPr>
+          <p:txBody>
+            <a:bodyPr wrap="none" rtlCol="0">
+              <a:spAutoFit/>
+            </a:bodyPr>
+            <a:lstStyle/>
+            <a:p>
+              <a:pPr algn="ctr"/>
+              <a:r>
+                <a:rPr lang="en-US" i="1" dirty="0"/>
+                <a:t>More accuracy</a:t>
+              </a:r>
+            </a:p>
+            <a:p>
+              <a:pPr algn="ctr"/>
+              <a:r>
+                <a:rPr lang="en-US" i="1" dirty="0"/>
+                <a:t>Less privacy</a:t>
+              </a:r>
+            </a:p>
+          </p:txBody>
+        </p:sp>
+      </p:grpSp>
       <p:pic>
         <p:nvPicPr>
           <p:cNvPr id="1026" name="Picture 2" descr="Probability density plots of Laplace distributions">
@@ -9962,6 +10331,457 @@
   <p:clrMapOvr>
     <a:masterClrMapping/>
   </p:clrMapOvr>
+  <p:transition spd="slow">
+    <p:wipe dir="r"/>
+  </p:transition>
+  <p:timing>
+    <p:tnLst>
+      <p:par>
+        <p:cTn id="1" dur="indefinite" restart="never" nodeType="tmRoot">
+          <p:childTnLst>
+            <p:seq concurrent="1" nextAc="seek">
+              <p:cTn id="2" dur="indefinite" nodeType="mainSeq">
+                <p:childTnLst>
+                  <p:par>
+                    <p:cTn id="3" fill="hold">
+                      <p:stCondLst>
+                        <p:cond delay="indefinite"/>
+                      </p:stCondLst>
+                      <p:childTnLst>
+                        <p:par>
+                          <p:cTn id="4" fill="hold">
+                            <p:stCondLst>
+                              <p:cond delay="0"/>
+                            </p:stCondLst>
+                            <p:childTnLst>
+                              <p:par>
+                                <p:cTn id="5" presetID="9" presetClass="entr" presetSubtype="0" fill="hold" grpId="0" nodeType="clickEffect">
+                                  <p:stCondLst>
+                                    <p:cond delay="0"/>
+                                  </p:stCondLst>
+                                  <p:childTnLst>
+                                    <p:set>
+                                      <p:cBhvr>
+                                        <p:cTn id="6" dur="1" fill="hold">
+                                          <p:stCondLst>
+                                            <p:cond delay="0"/>
+                                          </p:stCondLst>
+                                        </p:cTn>
+                                        <p:tgtEl>
+                                          <p:spTgt spid="8"/>
+                                        </p:tgtEl>
+                                        <p:attrNameLst>
+                                          <p:attrName>style.visibility</p:attrName>
+                                        </p:attrNameLst>
+                                      </p:cBhvr>
+                                      <p:to>
+                                        <p:strVal val="visible"/>
+                                      </p:to>
+                                    </p:set>
+                                    <p:animEffect transition="in" filter="dissolve">
+                                      <p:cBhvr>
+                                        <p:cTn id="7" dur="500"/>
+                                        <p:tgtEl>
+                                          <p:spTgt spid="8"/>
+                                        </p:tgtEl>
+                                      </p:cBhvr>
+                                    </p:animEffect>
+                                  </p:childTnLst>
+                                </p:cTn>
+                              </p:par>
+                            </p:childTnLst>
+                          </p:cTn>
+                        </p:par>
+                      </p:childTnLst>
+                    </p:cTn>
+                  </p:par>
+                  <p:par>
+                    <p:cTn id="8" fill="hold">
+                      <p:stCondLst>
+                        <p:cond delay="indefinite"/>
+                      </p:stCondLst>
+                      <p:childTnLst>
+                        <p:par>
+                          <p:cTn id="9" fill="hold">
+                            <p:stCondLst>
+                              <p:cond delay="0"/>
+                            </p:stCondLst>
+                            <p:childTnLst>
+                              <p:par>
+                                <p:cTn id="10" presetID="22" presetClass="entr" presetSubtype="4" fill="hold" nodeType="clickEffect">
+                                  <p:stCondLst>
+                                    <p:cond delay="0"/>
+                                  </p:stCondLst>
+                                  <p:childTnLst>
+                                    <p:set>
+                                      <p:cBhvr>
+                                        <p:cTn id="11" dur="1" fill="hold">
+                                          <p:stCondLst>
+                                            <p:cond delay="0"/>
+                                          </p:stCondLst>
+                                        </p:cTn>
+                                        <p:tgtEl>
+                                          <p:spTgt spid="1026"/>
+                                        </p:tgtEl>
+                                        <p:attrNameLst>
+                                          <p:attrName>style.visibility</p:attrName>
+                                        </p:attrNameLst>
+                                      </p:cBhvr>
+                                      <p:to>
+                                        <p:strVal val="visible"/>
+                                      </p:to>
+                                    </p:set>
+                                    <p:animEffect transition="in" filter="wipe(down)">
+                                      <p:cBhvr>
+                                        <p:cTn id="12" dur="500"/>
+                                        <p:tgtEl>
+                                          <p:spTgt spid="1026"/>
+                                        </p:tgtEl>
+                                      </p:cBhvr>
+                                    </p:animEffect>
+                                  </p:childTnLst>
+                                </p:cTn>
+                              </p:par>
+                            </p:childTnLst>
+                          </p:cTn>
+                        </p:par>
+                      </p:childTnLst>
+                    </p:cTn>
+                  </p:par>
+                  <p:par>
+                    <p:cTn id="13" fill="hold">
+                      <p:stCondLst>
+                        <p:cond delay="indefinite"/>
+                      </p:stCondLst>
+                      <p:childTnLst>
+                        <p:par>
+                          <p:cTn id="14" fill="hold">
+                            <p:stCondLst>
+                              <p:cond delay="0"/>
+                            </p:stCondLst>
+                            <p:childTnLst>
+                              <p:par>
+                                <p:cTn id="15" presetID="9" presetClass="entr" presetSubtype="0" fill="hold" grpId="0" nodeType="clickEffect">
+                                  <p:stCondLst>
+                                    <p:cond delay="0"/>
+                                  </p:stCondLst>
+                                  <p:childTnLst>
+                                    <p:set>
+                                      <p:cBhvr>
+                                        <p:cTn id="16" dur="1" fill="hold">
+                                          <p:stCondLst>
+                                            <p:cond delay="0"/>
+                                          </p:stCondLst>
+                                        </p:cTn>
+                                        <p:tgtEl>
+                                          <p:spTgt spid="5">
+                                            <p:txEl>
+                                              <p:pRg st="0" end="0"/>
+                                            </p:txEl>
+                                          </p:spTgt>
+                                        </p:tgtEl>
+                                        <p:attrNameLst>
+                                          <p:attrName>style.visibility</p:attrName>
+                                        </p:attrNameLst>
+                                      </p:cBhvr>
+                                      <p:to>
+                                        <p:strVal val="visible"/>
+                                      </p:to>
+                                    </p:set>
+                                    <p:animEffect transition="in" filter="dissolve">
+                                      <p:cBhvr>
+                                        <p:cTn id="17" dur="500"/>
+                                        <p:tgtEl>
+                                          <p:spTgt spid="5">
+                                            <p:txEl>
+                                              <p:pRg st="0" end="0"/>
+                                            </p:txEl>
+                                          </p:spTgt>
+                                        </p:tgtEl>
+                                      </p:cBhvr>
+                                    </p:animEffect>
+                                  </p:childTnLst>
+                                </p:cTn>
+                              </p:par>
+                            </p:childTnLst>
+                          </p:cTn>
+                        </p:par>
+                      </p:childTnLst>
+                    </p:cTn>
+                  </p:par>
+                  <p:par>
+                    <p:cTn id="18" fill="hold">
+                      <p:stCondLst>
+                        <p:cond delay="indefinite"/>
+                      </p:stCondLst>
+                      <p:childTnLst>
+                        <p:par>
+                          <p:cTn id="19" fill="hold">
+                            <p:stCondLst>
+                              <p:cond delay="0"/>
+                            </p:stCondLst>
+                            <p:childTnLst>
+                              <p:par>
+                                <p:cTn id="20" presetID="9" presetClass="entr" presetSubtype="0" fill="hold" nodeType="clickEffect">
+                                  <p:stCondLst>
+                                    <p:cond delay="0"/>
+                                  </p:stCondLst>
+                                  <p:childTnLst>
+                                    <p:set>
+                                      <p:cBhvr>
+                                        <p:cTn id="21" dur="1" fill="hold">
+                                          <p:stCondLst>
+                                            <p:cond delay="0"/>
+                                          </p:stCondLst>
+                                        </p:cTn>
+                                        <p:tgtEl>
+                                          <p:spTgt spid="3"/>
+                                        </p:tgtEl>
+                                        <p:attrNameLst>
+                                          <p:attrName>style.visibility</p:attrName>
+                                        </p:attrNameLst>
+                                      </p:cBhvr>
+                                      <p:to>
+                                        <p:strVal val="visible"/>
+                                      </p:to>
+                                    </p:set>
+                                    <p:animEffect transition="in" filter="dissolve">
+                                      <p:cBhvr>
+                                        <p:cTn id="22" dur="500"/>
+                                        <p:tgtEl>
+                                          <p:spTgt spid="3"/>
+                                        </p:tgtEl>
+                                      </p:cBhvr>
+                                    </p:animEffect>
+                                  </p:childTnLst>
+                                </p:cTn>
+                              </p:par>
+                            </p:childTnLst>
+                          </p:cTn>
+                        </p:par>
+                      </p:childTnLst>
+                    </p:cTn>
+                  </p:par>
+                  <p:par>
+                    <p:cTn id="23" fill="hold">
+                      <p:stCondLst>
+                        <p:cond delay="indefinite"/>
+                      </p:stCondLst>
+                      <p:childTnLst>
+                        <p:par>
+                          <p:cTn id="24" fill="hold">
+                            <p:stCondLst>
+                              <p:cond delay="0"/>
+                            </p:stCondLst>
+                            <p:childTnLst>
+                              <p:par>
+                                <p:cTn id="25" presetID="22" presetClass="entr" presetSubtype="8" fill="hold" nodeType="clickEffect">
+                                  <p:stCondLst>
+                                    <p:cond delay="0"/>
+                                  </p:stCondLst>
+                                  <p:childTnLst>
+                                    <p:set>
+                                      <p:cBhvr>
+                                        <p:cTn id="26" dur="1" fill="hold">
+                                          <p:stCondLst>
+                                            <p:cond delay="0"/>
+                                          </p:stCondLst>
+                                        </p:cTn>
+                                        <p:tgtEl>
+                                          <p:spTgt spid="17"/>
+                                        </p:tgtEl>
+                                        <p:attrNameLst>
+                                          <p:attrName>style.visibility</p:attrName>
+                                        </p:attrNameLst>
+                                      </p:cBhvr>
+                                      <p:to>
+                                        <p:strVal val="visible"/>
+                                      </p:to>
+                                    </p:set>
+                                    <p:animEffect transition="in" filter="wipe(left)">
+                                      <p:cBhvr>
+                                        <p:cTn id="27" dur="500"/>
+                                        <p:tgtEl>
+                                          <p:spTgt spid="17"/>
+                                        </p:tgtEl>
+                                      </p:cBhvr>
+                                    </p:animEffect>
+                                  </p:childTnLst>
+                                </p:cTn>
+                              </p:par>
+                            </p:childTnLst>
+                          </p:cTn>
+                        </p:par>
+                      </p:childTnLst>
+                    </p:cTn>
+                  </p:par>
+                  <p:par>
+                    <p:cTn id="28" fill="hold">
+                      <p:stCondLst>
+                        <p:cond delay="indefinite"/>
+                      </p:stCondLst>
+                      <p:childTnLst>
+                        <p:par>
+                          <p:cTn id="29" fill="hold">
+                            <p:stCondLst>
+                              <p:cond delay="0"/>
+                            </p:stCondLst>
+                            <p:childTnLst>
+                              <p:par>
+                                <p:cTn id="30" presetID="9" presetClass="entr" presetSubtype="0" fill="hold" grpId="0" nodeType="clickEffect">
+                                  <p:stCondLst>
+                                    <p:cond delay="0"/>
+                                  </p:stCondLst>
+                                  <p:childTnLst>
+                                    <p:set>
+                                      <p:cBhvr>
+                                        <p:cTn id="31" dur="1" fill="hold">
+                                          <p:stCondLst>
+                                            <p:cond delay="0"/>
+                                          </p:stCondLst>
+                                        </p:cTn>
+                                        <p:tgtEl>
+                                          <p:spTgt spid="4">
+                                            <p:txEl>
+                                              <p:pRg st="0" end="0"/>
+                                            </p:txEl>
+                                          </p:spTgt>
+                                        </p:tgtEl>
+                                        <p:attrNameLst>
+                                          <p:attrName>style.visibility</p:attrName>
+                                        </p:attrNameLst>
+                                      </p:cBhvr>
+                                      <p:to>
+                                        <p:strVal val="visible"/>
+                                      </p:to>
+                                    </p:set>
+                                    <p:animEffect transition="in" filter="dissolve">
+                                      <p:cBhvr>
+                                        <p:cTn id="32" dur="500"/>
+                                        <p:tgtEl>
+                                          <p:spTgt spid="4">
+                                            <p:txEl>
+                                              <p:pRg st="0" end="0"/>
+                                            </p:txEl>
+                                          </p:spTgt>
+                                        </p:tgtEl>
+                                      </p:cBhvr>
+                                    </p:animEffect>
+                                  </p:childTnLst>
+                                </p:cTn>
+                              </p:par>
+                              <p:par>
+                                <p:cTn id="33" presetID="9" presetClass="entr" presetSubtype="0" fill="hold" nodeType="withEffect">
+                                  <p:stCondLst>
+                                    <p:cond delay="0"/>
+                                  </p:stCondLst>
+                                  <p:childTnLst>
+                                    <p:set>
+                                      <p:cBhvr>
+                                        <p:cTn id="34" dur="1" fill="hold">
+                                          <p:stCondLst>
+                                            <p:cond delay="0"/>
+                                          </p:stCondLst>
+                                        </p:cTn>
+                                        <p:tgtEl>
+                                          <p:spTgt spid="9"/>
+                                        </p:tgtEl>
+                                        <p:attrNameLst>
+                                          <p:attrName>style.visibility</p:attrName>
+                                        </p:attrNameLst>
+                                      </p:cBhvr>
+                                      <p:to>
+                                        <p:strVal val="visible"/>
+                                      </p:to>
+                                    </p:set>
+                                    <p:animEffect transition="in" filter="dissolve">
+                                      <p:cBhvr>
+                                        <p:cTn id="35" dur="500"/>
+                                        <p:tgtEl>
+                                          <p:spTgt spid="9"/>
+                                        </p:tgtEl>
+                                      </p:cBhvr>
+                                    </p:animEffect>
+                                  </p:childTnLst>
+                                </p:cTn>
+                              </p:par>
+                            </p:childTnLst>
+                          </p:cTn>
+                        </p:par>
+                        <p:par>
+                          <p:cTn id="36" fill="hold">
+                            <p:stCondLst>
+                              <p:cond delay="500"/>
+                            </p:stCondLst>
+                            <p:childTnLst>
+                              <p:par>
+                                <p:cTn id="37" presetID="22" presetClass="entr" presetSubtype="8" fill="hold" nodeType="afterEffect">
+                                  <p:stCondLst>
+                                    <p:cond delay="0"/>
+                                  </p:stCondLst>
+                                  <p:childTnLst>
+                                    <p:set>
+                                      <p:cBhvr>
+                                        <p:cTn id="38" dur="1" fill="hold">
+                                          <p:stCondLst>
+                                            <p:cond delay="0"/>
+                                          </p:stCondLst>
+                                        </p:cTn>
+                                        <p:tgtEl>
+                                          <p:spTgt spid="18"/>
+                                        </p:tgtEl>
+                                        <p:attrNameLst>
+                                          <p:attrName>style.visibility</p:attrName>
+                                        </p:attrNameLst>
+                                      </p:cBhvr>
+                                      <p:to>
+                                        <p:strVal val="visible"/>
+                                      </p:to>
+                                    </p:set>
+                                    <p:animEffect transition="in" filter="wipe(left)">
+                                      <p:cBhvr>
+                                        <p:cTn id="39" dur="500"/>
+                                        <p:tgtEl>
+                                          <p:spTgt spid="18"/>
+                                        </p:tgtEl>
+                                      </p:cBhvr>
+                                    </p:animEffect>
+                                  </p:childTnLst>
+                                </p:cTn>
+                              </p:par>
+                            </p:childTnLst>
+                          </p:cTn>
+                        </p:par>
+                      </p:childTnLst>
+                    </p:cTn>
+                  </p:par>
+                </p:childTnLst>
+              </p:cTn>
+              <p:prevCondLst>
+                <p:cond evt="onPrev" delay="0">
+                  <p:tgtEl>
+                    <p:sldTgt/>
+                  </p:tgtEl>
+                </p:cond>
+              </p:prevCondLst>
+              <p:nextCondLst>
+                <p:cond evt="onNext" delay="0">
+                  <p:tgtEl>
+                    <p:sldTgt/>
+                  </p:tgtEl>
+                </p:cond>
+              </p:nextCondLst>
+            </p:seq>
+          </p:childTnLst>
+        </p:cTn>
+      </p:par>
+    </p:tnLst>
+    <p:bldLst>
+      <p:bldP spid="5" grpId="0" build="p"/>
+      <p:bldP spid="4" grpId="0" build="p"/>
+      <p:bldP spid="8" grpId="0"/>
+    </p:bldLst>
+  </p:timing>
 </p:sld>
 </file>
 
@@ -10084,7 +10904,7 @@
             </a:r>
             <a:r>
               <a:rPr lang="el-GR" dirty="0"/>
-              <a:t> ε</a:t>
+              <a:t>ε</a:t>
             </a:r>
             <a:r>
               <a:rPr lang="en-US" dirty="0"/>
@@ -10103,6 +10923,397 @@
   <p:clrMapOvr>
     <a:masterClrMapping/>
   </p:clrMapOvr>
+  <p:transition spd="med">
+    <p:pull/>
+  </p:transition>
+  <p:timing>
+    <p:tnLst>
+      <p:par>
+        <p:cTn id="1" dur="indefinite" restart="never" nodeType="tmRoot">
+          <p:childTnLst>
+            <p:seq concurrent="1" nextAc="seek">
+              <p:cTn id="2" dur="indefinite" nodeType="mainSeq">
+                <p:childTnLst>
+                  <p:par>
+                    <p:cTn id="3" fill="hold">
+                      <p:stCondLst>
+                        <p:cond delay="indefinite"/>
+                      </p:stCondLst>
+                      <p:childTnLst>
+                        <p:par>
+                          <p:cTn id="4" fill="hold">
+                            <p:stCondLst>
+                              <p:cond delay="0"/>
+                            </p:stCondLst>
+                            <p:childTnLst>
+                              <p:par>
+                                <p:cTn id="5" presetID="9" presetClass="entr" presetSubtype="0" fill="hold" grpId="0" nodeType="clickEffect">
+                                  <p:stCondLst>
+                                    <p:cond delay="0"/>
+                                  </p:stCondLst>
+                                  <p:childTnLst>
+                                    <p:set>
+                                      <p:cBhvr>
+                                        <p:cTn id="6" dur="1" fill="hold">
+                                          <p:stCondLst>
+                                            <p:cond delay="0"/>
+                                          </p:stCondLst>
+                                        </p:cTn>
+                                        <p:tgtEl>
+                                          <p:spTgt spid="3">
+                                            <p:txEl>
+                                              <p:pRg st="0" end="0"/>
+                                            </p:txEl>
+                                          </p:spTgt>
+                                        </p:tgtEl>
+                                        <p:attrNameLst>
+                                          <p:attrName>style.visibility</p:attrName>
+                                        </p:attrNameLst>
+                                      </p:cBhvr>
+                                      <p:to>
+                                        <p:strVal val="visible"/>
+                                      </p:to>
+                                    </p:set>
+                                    <p:animEffect transition="in" filter="dissolve">
+                                      <p:cBhvr>
+                                        <p:cTn id="7" dur="500"/>
+                                        <p:tgtEl>
+                                          <p:spTgt spid="3">
+                                            <p:txEl>
+                                              <p:pRg st="0" end="0"/>
+                                            </p:txEl>
+                                          </p:spTgt>
+                                        </p:tgtEl>
+                                      </p:cBhvr>
+                                    </p:animEffect>
+                                  </p:childTnLst>
+                                </p:cTn>
+                              </p:par>
+                              <p:par>
+                                <p:cTn id="8" presetID="9" presetClass="entr" presetSubtype="0" fill="hold" grpId="0" nodeType="withEffect">
+                                  <p:stCondLst>
+                                    <p:cond delay="0"/>
+                                  </p:stCondLst>
+                                  <p:childTnLst>
+                                    <p:set>
+                                      <p:cBhvr>
+                                        <p:cTn id="9" dur="1" fill="hold">
+                                          <p:stCondLst>
+                                            <p:cond delay="0"/>
+                                          </p:stCondLst>
+                                        </p:cTn>
+                                        <p:tgtEl>
+                                          <p:spTgt spid="3">
+                                            <p:txEl>
+                                              <p:pRg st="1" end="1"/>
+                                            </p:txEl>
+                                          </p:spTgt>
+                                        </p:tgtEl>
+                                        <p:attrNameLst>
+                                          <p:attrName>style.visibility</p:attrName>
+                                        </p:attrNameLst>
+                                      </p:cBhvr>
+                                      <p:to>
+                                        <p:strVal val="visible"/>
+                                      </p:to>
+                                    </p:set>
+                                    <p:animEffect transition="in" filter="dissolve">
+                                      <p:cBhvr>
+                                        <p:cTn id="10" dur="500"/>
+                                        <p:tgtEl>
+                                          <p:spTgt spid="3">
+                                            <p:txEl>
+                                              <p:pRg st="1" end="1"/>
+                                            </p:txEl>
+                                          </p:spTgt>
+                                        </p:tgtEl>
+                                      </p:cBhvr>
+                                    </p:animEffect>
+                                  </p:childTnLst>
+                                </p:cTn>
+                              </p:par>
+                            </p:childTnLst>
+                          </p:cTn>
+                        </p:par>
+                      </p:childTnLst>
+                    </p:cTn>
+                  </p:par>
+                  <p:par>
+                    <p:cTn id="11" fill="hold">
+                      <p:stCondLst>
+                        <p:cond delay="indefinite"/>
+                      </p:stCondLst>
+                      <p:childTnLst>
+                        <p:par>
+                          <p:cTn id="12" fill="hold">
+                            <p:stCondLst>
+                              <p:cond delay="0"/>
+                            </p:stCondLst>
+                            <p:childTnLst>
+                              <p:par>
+                                <p:cTn id="13" presetID="9" presetClass="entr" presetSubtype="0" fill="hold" grpId="0" nodeType="clickEffect">
+                                  <p:stCondLst>
+                                    <p:cond delay="0"/>
+                                  </p:stCondLst>
+                                  <p:childTnLst>
+                                    <p:set>
+                                      <p:cBhvr>
+                                        <p:cTn id="14" dur="1" fill="hold">
+                                          <p:stCondLst>
+                                            <p:cond delay="0"/>
+                                          </p:stCondLst>
+                                        </p:cTn>
+                                        <p:tgtEl>
+                                          <p:spTgt spid="3">
+                                            <p:txEl>
+                                              <p:pRg st="2" end="2"/>
+                                            </p:txEl>
+                                          </p:spTgt>
+                                        </p:tgtEl>
+                                        <p:attrNameLst>
+                                          <p:attrName>style.visibility</p:attrName>
+                                        </p:attrNameLst>
+                                      </p:cBhvr>
+                                      <p:to>
+                                        <p:strVal val="visible"/>
+                                      </p:to>
+                                    </p:set>
+                                    <p:animEffect transition="in" filter="dissolve">
+                                      <p:cBhvr>
+                                        <p:cTn id="15" dur="500"/>
+                                        <p:tgtEl>
+                                          <p:spTgt spid="3">
+                                            <p:txEl>
+                                              <p:pRg st="2" end="2"/>
+                                            </p:txEl>
+                                          </p:spTgt>
+                                        </p:tgtEl>
+                                      </p:cBhvr>
+                                    </p:animEffect>
+                                  </p:childTnLst>
+                                </p:cTn>
+                              </p:par>
+                              <p:par>
+                                <p:cTn id="16" presetID="9" presetClass="entr" presetSubtype="0" fill="hold" grpId="0" nodeType="withEffect">
+                                  <p:stCondLst>
+                                    <p:cond delay="0"/>
+                                  </p:stCondLst>
+                                  <p:childTnLst>
+                                    <p:set>
+                                      <p:cBhvr>
+                                        <p:cTn id="17" dur="1" fill="hold">
+                                          <p:stCondLst>
+                                            <p:cond delay="0"/>
+                                          </p:stCondLst>
+                                        </p:cTn>
+                                        <p:tgtEl>
+                                          <p:spTgt spid="3">
+                                            <p:txEl>
+                                              <p:pRg st="3" end="3"/>
+                                            </p:txEl>
+                                          </p:spTgt>
+                                        </p:tgtEl>
+                                        <p:attrNameLst>
+                                          <p:attrName>style.visibility</p:attrName>
+                                        </p:attrNameLst>
+                                      </p:cBhvr>
+                                      <p:to>
+                                        <p:strVal val="visible"/>
+                                      </p:to>
+                                    </p:set>
+                                    <p:animEffect transition="in" filter="dissolve">
+                                      <p:cBhvr>
+                                        <p:cTn id="18" dur="500"/>
+                                        <p:tgtEl>
+                                          <p:spTgt spid="3">
+                                            <p:txEl>
+                                              <p:pRg st="3" end="3"/>
+                                            </p:txEl>
+                                          </p:spTgt>
+                                        </p:tgtEl>
+                                      </p:cBhvr>
+                                    </p:animEffect>
+                                  </p:childTnLst>
+                                </p:cTn>
+                              </p:par>
+                              <p:par>
+                                <p:cTn id="19" presetID="9" presetClass="entr" presetSubtype="0" fill="hold" grpId="0" nodeType="withEffect">
+                                  <p:stCondLst>
+                                    <p:cond delay="0"/>
+                                  </p:stCondLst>
+                                  <p:childTnLst>
+                                    <p:set>
+                                      <p:cBhvr>
+                                        <p:cTn id="20" dur="1" fill="hold">
+                                          <p:stCondLst>
+                                            <p:cond delay="0"/>
+                                          </p:stCondLst>
+                                        </p:cTn>
+                                        <p:tgtEl>
+                                          <p:spTgt spid="3">
+                                            <p:txEl>
+                                              <p:pRg st="4" end="4"/>
+                                            </p:txEl>
+                                          </p:spTgt>
+                                        </p:tgtEl>
+                                        <p:attrNameLst>
+                                          <p:attrName>style.visibility</p:attrName>
+                                        </p:attrNameLst>
+                                      </p:cBhvr>
+                                      <p:to>
+                                        <p:strVal val="visible"/>
+                                      </p:to>
+                                    </p:set>
+                                    <p:animEffect transition="in" filter="dissolve">
+                                      <p:cBhvr>
+                                        <p:cTn id="21" dur="500"/>
+                                        <p:tgtEl>
+                                          <p:spTgt spid="3">
+                                            <p:txEl>
+                                              <p:pRg st="4" end="4"/>
+                                            </p:txEl>
+                                          </p:spTgt>
+                                        </p:tgtEl>
+                                      </p:cBhvr>
+                                    </p:animEffect>
+                                  </p:childTnLst>
+                                </p:cTn>
+                              </p:par>
+                              <p:par>
+                                <p:cTn id="22" presetID="9" presetClass="entr" presetSubtype="0" fill="hold" grpId="0" nodeType="withEffect">
+                                  <p:stCondLst>
+                                    <p:cond delay="0"/>
+                                  </p:stCondLst>
+                                  <p:childTnLst>
+                                    <p:set>
+                                      <p:cBhvr>
+                                        <p:cTn id="23" dur="1" fill="hold">
+                                          <p:stCondLst>
+                                            <p:cond delay="0"/>
+                                          </p:stCondLst>
+                                        </p:cTn>
+                                        <p:tgtEl>
+                                          <p:spTgt spid="3">
+                                            <p:txEl>
+                                              <p:pRg st="5" end="5"/>
+                                            </p:txEl>
+                                          </p:spTgt>
+                                        </p:tgtEl>
+                                        <p:attrNameLst>
+                                          <p:attrName>style.visibility</p:attrName>
+                                        </p:attrNameLst>
+                                      </p:cBhvr>
+                                      <p:to>
+                                        <p:strVal val="visible"/>
+                                      </p:to>
+                                    </p:set>
+                                    <p:animEffect transition="in" filter="dissolve">
+                                      <p:cBhvr>
+                                        <p:cTn id="24" dur="500"/>
+                                        <p:tgtEl>
+                                          <p:spTgt spid="3">
+                                            <p:txEl>
+                                              <p:pRg st="5" end="5"/>
+                                            </p:txEl>
+                                          </p:spTgt>
+                                        </p:tgtEl>
+                                      </p:cBhvr>
+                                    </p:animEffect>
+                                  </p:childTnLst>
+                                </p:cTn>
+                              </p:par>
+                            </p:childTnLst>
+                          </p:cTn>
+                        </p:par>
+                      </p:childTnLst>
+                    </p:cTn>
+                  </p:par>
+                  <p:par>
+                    <p:cTn id="25" fill="hold">
+                      <p:stCondLst>
+                        <p:cond delay="indefinite"/>
+                      </p:stCondLst>
+                      <p:childTnLst>
+                        <p:par>
+                          <p:cTn id="26" fill="hold">
+                            <p:stCondLst>
+                              <p:cond delay="0"/>
+                            </p:stCondLst>
+                            <p:childTnLst>
+                              <p:par>
+                                <p:cTn id="27" presetID="9" presetClass="entr" presetSubtype="0" fill="hold" grpId="0" nodeType="clickEffect">
+                                  <p:stCondLst>
+                                    <p:cond delay="0"/>
+                                  </p:stCondLst>
+                                  <p:childTnLst>
+                                    <p:set>
+                                      <p:cBhvr>
+                                        <p:cTn id="28" dur="1" fill="hold">
+                                          <p:stCondLst>
+                                            <p:cond delay="0"/>
+                                          </p:stCondLst>
+                                        </p:cTn>
+                                        <p:tgtEl>
+                                          <p:spTgt spid="3">
+                                            <p:txEl>
+                                              <p:pRg st="6" end="6"/>
+                                            </p:txEl>
+                                          </p:spTgt>
+                                        </p:tgtEl>
+                                        <p:attrNameLst>
+                                          <p:attrName>style.visibility</p:attrName>
+                                        </p:attrNameLst>
+                                      </p:cBhvr>
+                                      <p:to>
+                                        <p:strVal val="visible"/>
+                                      </p:to>
+                                    </p:set>
+                                    <p:animEffect transition="in" filter="dissolve">
+                                      <p:cBhvr>
+                                        <p:cTn id="29" dur="500"/>
+                                        <p:tgtEl>
+                                          <p:spTgt spid="3">
+                                            <p:txEl>
+                                              <p:pRg st="6" end="6"/>
+                                            </p:txEl>
+                                          </p:spTgt>
+                                        </p:tgtEl>
+                                      </p:cBhvr>
+                                    </p:animEffect>
+                                  </p:childTnLst>
+                                </p:cTn>
+                              </p:par>
+                            </p:childTnLst>
+                          </p:cTn>
+                        </p:par>
+                      </p:childTnLst>
+                    </p:cTn>
+                  </p:par>
+                </p:childTnLst>
+              </p:cTn>
+              <p:prevCondLst>
+                <p:cond evt="onPrev" delay="0">
+                  <p:tgtEl>
+                    <p:sldTgt/>
+                  </p:tgtEl>
+                </p:cond>
+              </p:prevCondLst>
+              <p:nextCondLst>
+                <p:cond evt="onNext" delay="0">
+                  <p:tgtEl>
+                    <p:sldTgt/>
+                  </p:tgtEl>
+                </p:cond>
+              </p:nextCondLst>
+            </p:seq>
+          </p:childTnLst>
+        </p:cTn>
+      </p:par>
+    </p:tnLst>
+    <p:bldLst>
+      <p:bldP spid="3" grpId="0" build="p"/>
+    </p:bldLst>
+  </p:timing>
 </p:sld>
 </file>
 
@@ -10266,6 +11477,9 @@
   <p:clrMapOvr>
     <a:masterClrMapping/>
   </p:clrMapOvr>
+  <p:transition spd="slow">
+    <p:push dir="u"/>
+  </p:transition>
   <p:timing>
     <p:tnLst>
       <p:par>
